--- a/Dokumentáció/PénzKút_Prezentacio.pptx
+++ b/Dokumentáció/PénzKút_Prezentacio.pptx
@@ -11,12 +11,12 @@
     <p:sldId id="256" r:id="rId2"/>
     <p:sldId id="257" r:id="rId3"/>
     <p:sldId id="258" r:id="rId4"/>
-    <p:sldId id="259" r:id="rId5"/>
-    <p:sldId id="260" r:id="rId6"/>
-    <p:sldId id="264" r:id="rId7"/>
-    <p:sldId id="272" r:id="rId8"/>
-    <p:sldId id="263" r:id="rId9"/>
-    <p:sldId id="273" r:id="rId10"/>
+    <p:sldId id="260" r:id="rId5"/>
+    <p:sldId id="264" r:id="rId6"/>
+    <p:sldId id="272" r:id="rId7"/>
+    <p:sldId id="263" r:id="rId8"/>
+    <p:sldId id="273" r:id="rId9"/>
+    <p:sldId id="275" r:id="rId10"/>
     <p:sldId id="269" r:id="rId11"/>
     <p:sldId id="267" r:id="rId12"/>
     <p:sldId id="270" r:id="rId13"/>
@@ -1244,88 +1244,93 @@
           <a:p>
             <a:r>
               <a:rPr lang="hu-HU" dirty="0"/>
-              <a:t>Minden egy gyors </a:t>
+              <a:t>Ezen a dián a StockMaster technológiai hátterét, vagyis a projektünk 'motorháztető alatti' részét mutatjuk be. A szoftver fejlesztése során a klasszikus és megbízható webes technológiák kombinációját választottuk, hogy egy stabil, mégis gyors platformot kapjunk.</a:t>
+            </a:r>
+          </a:p>
+          <a:p>
+            <a:r>
+              <a:rPr lang="hu-HU" dirty="0"/>
+              <a:t>A </a:t>
             </a:r>
             <a:r>
               <a:rPr lang="hu-HU" b="1" dirty="0"/>
-              <a:t>regisztrációval</a:t>
+              <a:t>Frontend</a:t>
             </a:r>
             <a:r>
               <a:rPr lang="hu-HU" dirty="0"/>
-              <a:t> kezdődik. Miután a rendszer rögzítette a felhasználót a </a:t>
+              <a:t> réteg alapjait a </a:t>
+            </a:r>
+            <a:r>
+              <a:rPr lang="hu-HU" b="1" dirty="0"/>
+              <a:t>HTML5 és a CSS3</a:t>
+            </a:r>
+            <a:r>
+              <a:rPr lang="hu-HU" dirty="0"/>
+              <a:t> adja, ami biztosítja a letisztult megjelenést és a </a:t>
             </a:r>
             <a:r>
               <a:rPr lang="hu-HU" dirty="0" err="1"/>
+              <a:t>reszponzivitást</a:t>
+            </a:r>
+            <a:r>
+              <a:rPr lang="hu-HU" dirty="0"/>
+              <a:t>. A </a:t>
+            </a:r>
+            <a:r>
+              <a:rPr lang="hu-HU" b="1" dirty="0"/>
+              <a:t>JavaScript</a:t>
+            </a:r>
+            <a:r>
+              <a:rPr lang="hu-HU" dirty="0"/>
+              <a:t> kulcsszerepet játszik nálunk: ez teszi lehetővé, hogy a gyertya-diagramok és az árfolyamok az oldal </a:t>
+            </a:r>
+            <a:r>
+              <a:rPr lang="hu-HU" dirty="0" err="1"/>
+              <a:t>újratöltése</a:t>
+            </a:r>
+            <a:r>
+              <a:rPr lang="hu-HU" dirty="0"/>
+              <a:t> nélkül, dinamikusan frissüljenek, valódi tőzsdei élményt nyújtva.</a:t>
+            </a:r>
+          </a:p>
+          <a:p>
+            <a:r>
+              <a:rPr lang="hu-HU" dirty="0"/>
+              <a:t>A </a:t>
+            </a:r>
+            <a:r>
+              <a:rPr lang="hu-HU" b="1" dirty="0"/>
+              <a:t>Backend</a:t>
+            </a:r>
+            <a:r>
+              <a:rPr lang="hu-HU" dirty="0"/>
+              <a:t>, tehát a szoftver agya, </a:t>
+            </a:r>
+            <a:r>
+              <a:rPr lang="hu-HU" b="1" dirty="0"/>
+              <a:t>PHP</a:t>
+            </a:r>
+            <a:r>
+              <a:rPr lang="hu-HU" dirty="0"/>
+              <a:t> nyelven készült. Ez a réteg felel a kritikus üzleti logikáért: itt futnak le a vétel-eladási algoritmusok, itt történik a fedezetellenőrzés, és ez a modul számolja ki a profitot vagy veszteséget minden zárás után.</a:t>
+            </a:r>
+          </a:p>
+          <a:p>
+            <a:r>
+              <a:rPr lang="hu-HU" dirty="0"/>
+              <a:t>Az adatok tárolására </a:t>
+            </a:r>
+            <a:r>
+              <a:rPr lang="hu-HU" b="1" dirty="0" err="1"/>
               <a:t>MySQL</a:t>
             </a:r>
             <a:r>
               <a:rPr lang="hu-HU" dirty="0"/>
-              <a:t> adatbázisban, a belépés után azonnal a </a:t>
-            </a:r>
-            <a:r>
-              <a:rPr lang="hu-HU" b="1" dirty="0" err="1"/>
-              <a:t>Dashboardra</a:t>
-            </a:r>
-            <a:r>
-              <a:rPr lang="hu-HU" dirty="0"/>
-              <a:t> kerül. Itt egy tiszta, átlátható felület fogadja, ahol láthatja a rendelkezésére álló virtuális keretet.</a:t>
-            </a:r>
-          </a:p>
-          <a:p>
-            <a:r>
-              <a:rPr lang="hu-HU" dirty="0"/>
-              <a:t>A használat során a felhasználó a bal oldali </a:t>
-            </a:r>
-            <a:r>
-              <a:rPr lang="hu-HU" b="1" dirty="0"/>
-              <a:t>kereső fül</a:t>
-            </a:r>
-            <a:r>
-              <a:rPr lang="hu-HU" dirty="0"/>
-              <a:t> segítségével választhatja ki a számára érdekes eszközt. A rendszer lényege az interakció: a felhasználó eldönti, hogy vétel vagy eladás irányba nyit pozíciót. Fontos kiemelni, hogy minden ilyen művelet mögött az </a:t>
-            </a:r>
-            <a:r>
-              <a:rPr lang="hu-HU" b="1" dirty="0"/>
-              <a:t>algoritmusunk</a:t>
-            </a:r>
-            <a:r>
-              <a:rPr lang="hu-HU" dirty="0"/>
-              <a:t> azonnal ellenőrzi a fedezetet, és rögzíti a tranzakciót.</a:t>
-            </a:r>
-          </a:p>
-          <a:p>
-            <a:r>
-              <a:rPr lang="hu-HU" dirty="0"/>
-              <a:t>Amíg a pozíció nyitva van, a felhasználó nem marad magára. Ellátogathat az </a:t>
-            </a:r>
-            <a:r>
-              <a:rPr lang="hu-HU" b="1" dirty="0"/>
-              <a:t>Oktatóanyagok</a:t>
-            </a:r>
-            <a:r>
-              <a:rPr lang="hu-HU" dirty="0"/>
-              <a:t> fülre, ahol elméleti segítséget kap a piaci mozgások megértéséhez.</a:t>
-            </a:r>
-          </a:p>
-          <a:p>
-            <a:r>
-              <a:rPr lang="hu-HU" dirty="0"/>
-              <a:t>pozíció lezárásakor történik a legérdekesebb rész: a rendszerünk másodpercek alatt kiszámolja az eredményt, frissíti az egyenleget, és a </a:t>
-            </a:r>
-            <a:r>
-              <a:rPr lang="hu-HU" b="1" dirty="0"/>
-              <a:t>Statisztika</a:t>
-            </a:r>
-            <a:r>
-              <a:rPr lang="hu-HU" dirty="0"/>
-              <a:t> fülön azonnal láthatóvá válik az ügylet hatása a teljes portfólióra.</a:t>
-            </a:r>
-          </a:p>
-          <a:p>
-            <a:r>
-              <a:rPr lang="hu-HU" dirty="0"/>
-              <a:t>Mind ezek közben a felhasználó ellátogathat a tranzakció fülre is ahol további összeggel növelheti egyenlegét. Illetve Beállítások fülön keresztül a saját profilját állíthatja, illetve híreket olvashat amik teljesen valós időben jelennek meg</a:t>
-            </a:r>
+              <a:t> relációs adatbázist használunk. Ahogy az adatszerkezeti dokumentációnkban is látható, a rendszerünk normalizált táblákban tárolja a felhasználói profilokat, a kereskedési naplókat és a fejlődési statisztikákat. Ez az összeállítás garantálja, hogy a StockMaster egyszerre legyen biztonságos és villámgyors a lekérdezések során.</a:t>
+            </a:r>
+          </a:p>
+          <a:p>
+            <a:endParaRPr lang="hu-HU" dirty="0"/>
           </a:p>
         </p:txBody>
       </p:sp>
@@ -1355,7 +1360,7 @@
     </p:spTree>
     <p:extLst>
       <p:ext uri="{BB962C8B-B14F-4D97-AF65-F5344CB8AC3E}">
-        <p14:creationId xmlns:p14="http://schemas.microsoft.com/office/powerpoint/2010/main" val="3561326476"/>
+        <p14:creationId xmlns:p14="http://schemas.microsoft.com/office/powerpoint/2010/main" val="2639655426"/>
       </p:ext>
     </p:extLst>
   </p:cSld>
@@ -1411,93 +1416,36 @@
           <a:p>
             <a:r>
               <a:rPr lang="hu-HU" dirty="0"/>
-              <a:t>Ezen a dián a StockMaster technológiai hátterét, vagyis a projektünk 'motorháztető alatti' részét mutatjuk be. A szoftver fejlesztése során a klasszikus és megbízható webes technológiák kombinációját választottuk, hogy egy stabil, mégis gyors platformot kapjunk.</a:t>
+              <a:t>A frontend fejlesztésekor a legfőbb szempontunk az volt, hogy egy tőzsdei szoftver komplexitását érthetővé és átláthatóvá tegyük a kezdők számára is.</a:t>
             </a:r>
           </a:p>
           <a:p>
             <a:r>
               <a:rPr lang="hu-HU" dirty="0"/>
-              <a:t>A </a:t>
+              <a:t>A technológiai alapokat a </a:t>
             </a:r>
             <a:r>
               <a:rPr lang="hu-HU" b="1" dirty="0"/>
-              <a:t>Frontend</a:t>
+              <a:t>HTML5, CSS3 és a JavaScript</a:t>
             </a:r>
             <a:r>
               <a:rPr lang="hu-HU" dirty="0"/>
-              <a:t> réteg alapjait a </a:t>
-            </a:r>
-            <a:r>
-              <a:rPr lang="hu-HU" b="1" dirty="0"/>
-              <a:t>HTML5 és a CSS3</a:t>
-            </a:r>
+              <a:t> szolgáltatják. Utóbbi teszi lehetővé, hogy a platformunk ne legyen statikus: a gyertya-diagramok dinamikusan rajzolódnak ki, és a felhasználó igénye szerint válthat az idősíkok között, legyen szó 1 perces vagy akár heti bontásról.</a:t>
+            </a:r>
+          </a:p>
+          <a:p>
             <a:r>
               <a:rPr lang="hu-HU" dirty="0"/>
-              <a:t> adja, ami biztosítja a letisztult megjelenést és a </a:t>
+              <a:t>nagy hangsúlyt fektettünk az esztétikára. A bal oldali keresősáv segítségével a felhasználók gyorsan válthatnak a különböző részvények és </a:t>
             </a:r>
             <a:r>
               <a:rPr lang="hu-HU" dirty="0" err="1"/>
-              <a:t>reszponzivitást</a:t>
+              <a:t>kriptovaluták</a:t>
             </a:r>
             <a:r>
               <a:rPr lang="hu-HU" dirty="0"/>
-              <a:t>. A </a:t>
-            </a:r>
-            <a:r>
-              <a:rPr lang="hu-HU" b="1" dirty="0"/>
-              <a:t>JavaScript</a:t>
-            </a:r>
-            <a:r>
-              <a:rPr lang="hu-HU" dirty="0"/>
-              <a:t> kulcsszerepet játszik nálunk: ez teszi lehetővé, hogy a gyertya-diagramok és az árfolyamok az oldal </a:t>
-            </a:r>
-            <a:r>
-              <a:rPr lang="hu-HU" dirty="0" err="1"/>
-              <a:t>újratöltése</a:t>
-            </a:r>
-            <a:r>
-              <a:rPr lang="hu-HU" dirty="0"/>
-              <a:t> nélkül, dinamikusan frissüljenek, valódi tőzsdei élményt nyújtva.</a:t>
-            </a:r>
-          </a:p>
-          <a:p>
-            <a:r>
-              <a:rPr lang="hu-HU" dirty="0"/>
-              <a:t>A </a:t>
-            </a:r>
-            <a:r>
-              <a:rPr lang="hu-HU" b="1" dirty="0"/>
-              <a:t>Backend</a:t>
-            </a:r>
-            <a:r>
-              <a:rPr lang="hu-HU" dirty="0"/>
-              <a:t>, tehát a szoftver agya, </a:t>
-            </a:r>
-            <a:r>
-              <a:rPr lang="hu-HU" b="1" dirty="0"/>
-              <a:t>PHP</a:t>
-            </a:r>
-            <a:r>
-              <a:rPr lang="hu-HU" dirty="0"/>
-              <a:t> nyelven készült. Ez a réteg felel a kritikus üzleti logikáért: itt futnak le a vétel-eladási algoritmusok, itt történik a fedezetellenőrzés, és ez a modul számolja ki a profitot vagy veszteséget minden zárás után.</a:t>
-            </a:r>
-          </a:p>
-          <a:p>
-            <a:r>
-              <a:rPr lang="hu-HU" dirty="0"/>
-              <a:t>Az adatok tárolására </a:t>
-            </a:r>
-            <a:r>
-              <a:rPr lang="hu-HU" b="1" dirty="0" err="1"/>
-              <a:t>MySQL</a:t>
-            </a:r>
-            <a:r>
-              <a:rPr lang="hu-HU" dirty="0"/>
-              <a:t> relációs adatbázist használunk. Ahogy az adatszerkezeti dokumentációnkban is látható, a rendszerünk normalizált táblákban tárolja a felhasználói profilokat, a kereskedési naplókat és a fejlődési statisztikákat. Ez az összeállítás garantálja, hogy a StockMaster egyszerre legyen biztonságos és villámgyors a lekérdezések során.</a:t>
-            </a:r>
-          </a:p>
-          <a:p>
-            <a:endParaRPr lang="hu-HU" dirty="0"/>
+              <a:t> között. A tranzakciós felületen a vétel és eladás gombok azonnali vizuális visszajelzést adnak, a portfólió pedig valós időben mutatja az egyenleg változását.</a:t>
+            </a:r>
           </a:p>
         </p:txBody>
       </p:sp>
@@ -1527,7 +1475,7 @@
     </p:spTree>
     <p:extLst>
       <p:ext uri="{BB962C8B-B14F-4D97-AF65-F5344CB8AC3E}">
-        <p14:creationId xmlns:p14="http://schemas.microsoft.com/office/powerpoint/2010/main" val="2639655426"/>
+        <p14:creationId xmlns:p14="http://schemas.microsoft.com/office/powerpoint/2010/main" val="514705530"/>
       </p:ext>
     </p:extLst>
   </p:cSld>
@@ -1583,36 +1531,57 @@
           <a:p>
             <a:r>
               <a:rPr lang="hu-HU" dirty="0"/>
-              <a:t>A frontend fejlesztésekor a legfőbb szempontunk az volt, hogy egy tőzsdei szoftver komplexitását érthetővé és átláthatóvá tegyük a kezdők számára is.</a:t>
-            </a:r>
-          </a:p>
-          <a:p>
+              <a:t>A frontend tesztelése során az volt a célunk, hogy a felhasználói felület minden interaktív eleme stabilan </a:t>
+            </a:r>
+            <a:r>
+              <a:rPr lang="hu-HU" dirty="0" err="1"/>
+              <a:t>működjön</a:t>
+            </a:r>
             <a:r>
               <a:rPr lang="hu-HU" dirty="0"/>
-              <a:t>A technológiai alapokat a </a:t>
+              <a:t>. Ehhez a </a:t>
             </a:r>
             <a:r>
               <a:rPr lang="hu-HU" b="1" dirty="0"/>
-              <a:t>HTML5, CSS3 és a JavaScript</a:t>
+              <a:t>Robot Framework</a:t>
             </a:r>
             <a:r>
               <a:rPr lang="hu-HU" dirty="0"/>
-              <a:t> szolgáltatják. Utóbbi teszi lehetővé, hogy a platformunk ne legyen statikus: a gyertya-diagramok dinamikusan rajzolódnak ki, és a felhasználó igénye szerint válthat az idősíkok között, legyen szó 1 perces vagy akár heti bontásról.</a:t>
-            </a:r>
-          </a:p>
-          <a:p>
+              <a:t> keretrendszert használtuk, </a:t>
+            </a:r>
+            <a:r>
+              <a:rPr lang="hu-HU" b="1" dirty="0" err="1"/>
+              <a:t>Selenium</a:t>
+            </a:r>
             <a:r>
               <a:rPr lang="hu-HU" dirty="0"/>
-              <a:t>nagy hangsúlyt fektettünk az esztétikára. A bal oldali keresősáv segítségével a felhasználók gyorsan válthatnak a különböző részvények és </a:t>
+              <a:t> könyvtárral kiegészítve, a teszteseteket pedig a </a:t>
+            </a:r>
+            <a:r>
+              <a:rPr lang="hu-HU" b="1" dirty="0"/>
+              <a:t>RIDE</a:t>
+            </a:r>
+            <a:r>
+              <a:rPr lang="hu-HU" dirty="0"/>
+              <a:t> grafikus felületén menedzseltük.</a:t>
+            </a:r>
+          </a:p>
+          <a:p>
+            <a:r>
+              <a:rPr lang="hu-HU" dirty="0"/>
+              <a:t>Az automatizált tesztjeink lefedték a teljes felhasználói utat a regisztrációtól kezdve a részvényvásárláson át a kijelentkezésig. A tesztek során a kritikus funkciók – mint például az egyenleg csökkenése vétel után – hibátlanul futottak le. Ugyanakkor azonosítottunk egy magas prioritású esztétikai hibát: az eladás, azaz a </a:t>
             </a:r>
             <a:r>
               <a:rPr lang="hu-HU" dirty="0" err="1"/>
-              <a:t>kriptovaluták</a:t>
+              <a:t>short</a:t>
             </a:r>
             <a:r>
               <a:rPr lang="hu-HU" dirty="0"/>
-              <a:t> között. A tranzakciós felületen a vétel és eladás gombok azonnali vizuális visszajelzést adnak, a portfólió pedig valós időben mutatja az egyenleg változását.</a:t>
-            </a:r>
+              <a:t> pozíciók megnyitásakor a grafikus felületen az árfolyam kijelzése néha szétcsúszik. Ezt a hibajegyet rögzítettük, és a vizuális korrekció már folyamatban van.</a:t>
+            </a:r>
+          </a:p>
+          <a:p>
+            <a:endParaRPr lang="hu-HU" dirty="0"/>
           </a:p>
         </p:txBody>
       </p:sp>
@@ -1642,7 +1611,7 @@
     </p:spTree>
     <p:extLst>
       <p:ext uri="{BB962C8B-B14F-4D97-AF65-F5344CB8AC3E}">
-        <p14:creationId xmlns:p14="http://schemas.microsoft.com/office/powerpoint/2010/main" val="514705530"/>
+        <p14:creationId xmlns:p14="http://schemas.microsoft.com/office/powerpoint/2010/main" val="1195591999"/>
       </p:ext>
     </p:extLst>
   </p:cSld>
@@ -1698,53 +1667,43 @@
           <a:p>
             <a:r>
               <a:rPr lang="hu-HU" dirty="0"/>
-              <a:t>A frontend tesztelése során az volt a célunk, hogy a felhasználói felület minden interaktív eleme stabilan </a:t>
-            </a:r>
-            <a:r>
-              <a:rPr lang="hu-HU" dirty="0" err="1"/>
-              <a:t>működjön</a:t>
-            </a:r>
+              <a:t>Ezen a dián a StockMaster technológiai hátterét, vagyis a projektünk 'motorháztető alatti' részét mutatjuk be. A szoftver fejlesztése során a klasszikus és megbízható webes technológiák kombinációját választottuk, hogy egy stabil, mégis gyors platformot kapjunk.</a:t>
+            </a:r>
+          </a:p>
+          <a:p>
             <a:r>
               <a:rPr lang="hu-HU" dirty="0"/>
-              <a:t>. Ehhez a </a:t>
+              <a:t>A </a:t>
             </a:r>
             <a:r>
               <a:rPr lang="hu-HU" b="1" dirty="0"/>
-              <a:t>Robot Framework</a:t>
+              <a:t>Backend</a:t>
             </a:r>
             <a:r>
               <a:rPr lang="hu-HU" dirty="0"/>
-              <a:t> keretrendszert használtuk, </a:t>
+              <a:t>, tehát a szoftver agya, </a:t>
+            </a:r>
+            <a:r>
+              <a:rPr lang="hu-HU" b="1" dirty="0"/>
+              <a:t>PHP</a:t>
+            </a:r>
+            <a:r>
+              <a:rPr lang="hu-HU" dirty="0"/>
+              <a:t> nyelven készült. Ez a réteg felel a kritikus üzleti logikáért: itt futnak le a vétel-eladási algoritmusok, itt történik a fedezetellenőrzés, és ez a modul számolja ki a profitot vagy veszteséget minden zárás után.</a:t>
+            </a:r>
+          </a:p>
+          <a:p>
+            <a:r>
+              <a:rPr lang="hu-HU" dirty="0"/>
+              <a:t>Az adatok tárolására </a:t>
             </a:r>
             <a:r>
               <a:rPr lang="hu-HU" b="1" dirty="0" err="1"/>
-              <a:t>Selenium</a:t>
+              <a:t>MySQL</a:t>
             </a:r>
             <a:r>
               <a:rPr lang="hu-HU" dirty="0"/>
-              <a:t> könyvtárral kiegészítve, a teszteseteket pedig a </a:t>
-            </a:r>
-            <a:r>
-              <a:rPr lang="hu-HU" b="1" dirty="0"/>
-              <a:t>RIDE</a:t>
-            </a:r>
-            <a:r>
-              <a:rPr lang="hu-HU" dirty="0"/>
-              <a:t> grafikus felületén menedzseltük.</a:t>
-            </a:r>
-          </a:p>
-          <a:p>
-            <a:r>
-              <a:rPr lang="hu-HU" dirty="0"/>
-              <a:t>Az automatizált tesztjeink lefedték a teljes felhasználói utat a regisztrációtól kezdve a részvényvásárláson át a kijelentkezésig. A tesztek során a kritikus funkciók – mint például az egyenleg csökkenése vétel után – hibátlanul futottak le. Ugyanakkor azonosítottunk egy magas prioritású esztétikai hibát: az eladás, azaz a </a:t>
-            </a:r>
-            <a:r>
-              <a:rPr lang="hu-HU" dirty="0" err="1"/>
-              <a:t>short</a:t>
-            </a:r>
-            <a:r>
-              <a:rPr lang="hu-HU" dirty="0"/>
-              <a:t> pozíciók megnyitásakor a grafikus felületen az árfolyam kijelzése néha szétcsúszik. Ezt a hibajegyet rögzítettük, és a vizuális korrekció már folyamatban van.</a:t>
+              <a:t> relációs adatbázist használunk. Ahogy az adatszerkezeti dokumentációnkban is látható, a rendszerünk normalizált táblákban tárolja a felhasználói profilokat, a kereskedési naplókat és a fejlődési statisztikákat. Ez az összeállítás garantálja, hogy a StockMaster egyszerre legyen biztonságos és villámgyors a lekérdezések során.</a:t>
             </a:r>
           </a:p>
           <a:p>
@@ -1778,7 +1737,7 @@
     </p:spTree>
     <p:extLst>
       <p:ext uri="{BB962C8B-B14F-4D97-AF65-F5344CB8AC3E}">
-        <p14:creationId xmlns:p14="http://schemas.microsoft.com/office/powerpoint/2010/main" val="1195591999"/>
+        <p14:creationId xmlns:p14="http://schemas.microsoft.com/office/powerpoint/2010/main" val="2805143975"/>
       </p:ext>
     </p:extLst>
   </p:cSld>
@@ -1834,43 +1793,36 @@
           <a:p>
             <a:r>
               <a:rPr lang="hu-HU" dirty="0"/>
-              <a:t>Ezen a dián a StockMaster technológiai hátterét, vagyis a projektünk 'motorháztető alatti' részét mutatjuk be. A szoftver fejlesztése során a klasszikus és megbízható webes technológiák kombinációját választottuk, hogy egy stabil, mégis gyors platformot kapjunk.</a:t>
-            </a:r>
-          </a:p>
-          <a:p>
-            <a:r>
+              <a:t>A backend tesztelés biztosítja, hogy az alkalmazás üzleti logikája, API végpontjai és adatkezelése hibamentesen működjenek.</a:t>
+            </a:r>
+            <a:br>
               <a:rPr lang="hu-HU" dirty="0"/>
-              <a:t>A </a:t>
-            </a:r>
-            <a:r>
-              <a:rPr lang="hu-HU" b="1" dirty="0"/>
-              <a:t>Backend</a:t>
-            </a:r>
+            </a:br>
             <a:r>
               <a:rPr lang="hu-HU" dirty="0"/>
-              <a:t>, tehát a szoftver agya, </a:t>
-            </a:r>
-            <a:r>
-              <a:rPr lang="hu-HU" b="1" dirty="0"/>
-              <a:t>PHP</a:t>
-            </a:r>
+              <a:t>A képen egy automatizált tesztfuttatás látható, ahol különböző API funkciók kerülnek ellenőrzésre (pl. validációk, limit kezelések, hibakezelés).</a:t>
+            </a:r>
+          </a:p>
+          <a:p>
             <a:r>
               <a:rPr lang="hu-HU" dirty="0"/>
-              <a:t> nyelven készült. Ez a réteg felel a kritikus üzleti logikáért: itt futnak le a vétel-eladási algoritmusok, itt történik a fedezetellenőrzés, és ez a modul számolja ki a profitot vagy veszteséget minden zárás után.</a:t>
-            </a:r>
-          </a:p>
-          <a:p>
+              <a:t>A sikeres tesztek (PASS) azt jelzik, hogy a rendszer stabil, és a különböző </a:t>
+            </a:r>
+            <a:r>
+              <a:rPr lang="hu-HU" dirty="0" err="1"/>
+              <a:t>edge</a:t>
+            </a:r>
             <a:r>
               <a:rPr lang="hu-HU" dirty="0"/>
-              <a:t>Az adatok tárolására </a:t>
-            </a:r>
-            <a:r>
-              <a:rPr lang="hu-HU" b="1" dirty="0" err="1"/>
-              <a:t>MySQL</a:t>
+              <a:t> </a:t>
+            </a:r>
+            <a:r>
+              <a:rPr lang="hu-HU" dirty="0" err="1"/>
+              <a:t>case-eket</a:t>
             </a:r>
             <a:r>
               <a:rPr lang="hu-HU" dirty="0"/>
-              <a:t> relációs adatbázist használunk. Ahogy az adatszerkezeti dokumentációnkban is látható, a rendszerünk normalizált táblákban tárolja a felhasználói profilokat, a kereskedési naplókat és a fejlődési statisztikákat. Ez az összeállítás garantálja, hogy a StockMaster egyszerre legyen biztonságos és villámgyors a lekérdezések során.</a:t>
+              <a:t> is megfelelően kezeli. Az automatizált tesztelés kulcsfontosságú a megbízható és skálázható backend fejlesztéshez.</a:t>
             </a:r>
           </a:p>
           <a:p>
@@ -1904,7 +1856,7 @@
     </p:spTree>
     <p:extLst>
       <p:ext uri="{BB962C8B-B14F-4D97-AF65-F5344CB8AC3E}">
-        <p14:creationId xmlns:p14="http://schemas.microsoft.com/office/powerpoint/2010/main" val="2805143975"/>
+        <p14:creationId xmlns:p14="http://schemas.microsoft.com/office/powerpoint/2010/main" val="2923390516"/>
       </p:ext>
     </p:extLst>
   </p:cSld>
@@ -1960,40 +1912,24 @@
           <a:p>
             <a:r>
               <a:rPr lang="hu-HU" dirty="0"/>
-              <a:t>A backend tesztelés biztosítja, hogy az alkalmazás üzleti logikája, API végpontjai és adatkezelése hibamentesen működjenek.</a:t>
-            </a:r>
-            <a:br>
+              <a:t>Az alkalmazás különböző eszközökön – például mobilon, tableten és számítógépen – is megfelelően jelenik meg, használható marad és a felhasználói élmény minden platformon egységes és könnyen kezelhető marad.. A </a:t>
+            </a:r>
+            <a:r>
+              <a:rPr lang="hu-HU" dirty="0" err="1"/>
+              <a:t>Bootstrap</a:t>
+            </a:r>
+            <a:r>
               <a:rPr lang="hu-HU" dirty="0"/>
-            </a:br>
+              <a:t> keretrendszert használjuk, amely beépített megoldásokat biztosít a reszponzív tervezéshez. Ilyen például a </a:t>
+            </a:r>
+            <a:r>
+              <a:rPr lang="hu-HU" dirty="0" err="1"/>
+              <a:t>grid</a:t>
+            </a:r>
             <a:r>
               <a:rPr lang="hu-HU" dirty="0"/>
-              <a:t>A képen egy automatizált tesztfuttatás látható, ahol különböző API funkciók kerülnek ellenőrzésre (pl. validációk, limit kezelések, hibakezelés).</a:t>
-            </a:r>
-          </a:p>
-          <a:p>
-            <a:r>
-              <a:rPr lang="hu-HU" dirty="0"/>
-              <a:t>A sikeres tesztek (PASS) azt jelzik, hogy a rendszer stabil, és a különböző </a:t>
-            </a:r>
-            <a:r>
-              <a:rPr lang="hu-HU" dirty="0" err="1"/>
-              <a:t>edge</a:t>
-            </a:r>
-            <a:r>
-              <a:rPr lang="hu-HU" dirty="0"/>
-              <a:t> </a:t>
-            </a:r>
-            <a:r>
-              <a:rPr lang="hu-HU" dirty="0" err="1"/>
-              <a:t>case-eket</a:t>
-            </a:r>
-            <a:r>
-              <a:rPr lang="hu-HU" dirty="0"/>
-              <a:t> is megfelelően kezeli. Az automatizált tesztelés kulcsfontosságú a megbízható és skálázható backend fejlesztéshez.</a:t>
-            </a:r>
-          </a:p>
-          <a:p>
-            <a:endParaRPr lang="hu-HU" dirty="0"/>
+              <a:t> rendszer, amely lehetővé teszi, hogy az oldal elemei automatikusan átrendeződjenek a képernyő méretének megfelelően.</a:t>
+            </a:r>
           </a:p>
         </p:txBody>
       </p:sp>
@@ -2023,7 +1959,7 @@
     </p:spTree>
     <p:extLst>
       <p:ext uri="{BB962C8B-B14F-4D97-AF65-F5344CB8AC3E}">
-        <p14:creationId xmlns:p14="http://schemas.microsoft.com/office/powerpoint/2010/main" val="2923390516"/>
+        <p14:creationId xmlns:p14="http://schemas.microsoft.com/office/powerpoint/2010/main" val="831793088"/>
       </p:ext>
     </p:extLst>
   </p:cSld>
@@ -9525,446 +9461,6 @@
 </file>
 
 <file path=ppt/slides/slide4.xml><?xml version="1.0" encoding="utf-8"?>
-<p:sld xmlns:a="http://schemas.openxmlformats.org/drawingml/2006/main" xmlns:r="http://schemas.openxmlformats.org/officeDocument/2006/relationships" xmlns:p="http://schemas.openxmlformats.org/presentationml/2006/main">
-  <p:cSld>
-    <p:spTree>
-      <p:nvGrpSpPr>
-        <p:cNvPr id="1" name=""/>
-        <p:cNvGrpSpPr/>
-        <p:nvPr/>
-      </p:nvGrpSpPr>
-      <p:grpSpPr>
-        <a:xfrm>
-          <a:off x="0" y="0"/>
-          <a:ext cx="0" cy="0"/>
-          <a:chOff x="0" y="0"/>
-          <a:chExt cx="0" cy="0"/>
-        </a:xfrm>
-      </p:grpSpPr>
-      <p:pic>
-        <p:nvPicPr>
-          <p:cNvPr id="9" name="Kép 8">
-            <a:extLst>
-              <a:ext uri="{FF2B5EF4-FFF2-40B4-BE49-F238E27FC236}">
-                <a16:creationId xmlns:a16="http://schemas.microsoft.com/office/drawing/2014/main" id="{A23EA274-742D-40BE-85FB-A8725616E683}"/>
-              </a:ext>
-            </a:extLst>
-          </p:cNvPr>
-          <p:cNvPicPr>
-            <a:picLocks noChangeAspect="1"/>
-          </p:cNvPicPr>
-          <p:nvPr/>
-        </p:nvPicPr>
-        <p:blipFill>
-          <a:blip r:embed="rId3">
-            <a:extLst>
-              <a:ext uri="{BEBA8EAE-BF5A-486C-A8C5-ECC9F3942E4B}">
-                <a14:imgProps xmlns:a14="http://schemas.microsoft.com/office/drawing/2010/main">
-                  <a14:imgLayer r:embed="rId4">
-                    <a14:imgEffect>
-                      <a14:sharpenSoften amount="-49000"/>
-                    </a14:imgEffect>
-                    <a14:imgEffect>
-                      <a14:brightnessContrast bright="-20000"/>
-                    </a14:imgEffect>
-                  </a14:imgLayer>
-                </a14:imgProps>
-              </a:ext>
-              <a:ext uri="{28A0092B-C50C-407E-A947-70E740481C1C}">
-                <a14:useLocalDpi xmlns:a14="http://schemas.microsoft.com/office/drawing/2010/main" val="0"/>
-              </a:ext>
-            </a:extLst>
-          </a:blip>
-          <a:stretch>
-            <a:fillRect/>
-          </a:stretch>
-        </p:blipFill>
-        <p:spPr>
-          <a:xfrm>
-            <a:off x="0" y="-6376"/>
-            <a:ext cx="12192000" cy="6864376"/>
-          </a:xfrm>
-          <a:prstGeom prst="rect">
-            <a:avLst/>
-          </a:prstGeom>
-          <a:effectLst>
-            <a:outerShdw dist="50800" dir="5400000" algn="ctr" rotWithShape="0">
-              <a:srgbClr val="000000">
-                <a:alpha val="96000"/>
-              </a:srgbClr>
-            </a:outerShdw>
-          </a:effectLst>
-        </p:spPr>
-      </p:pic>
-      <p:sp>
-        <p:nvSpPr>
-          <p:cNvPr id="2" name="Cím 1">
-            <a:extLst>
-              <a:ext uri="{FF2B5EF4-FFF2-40B4-BE49-F238E27FC236}">
-                <a16:creationId xmlns:a16="http://schemas.microsoft.com/office/drawing/2014/main" id="{A8261EA8-6DD7-4200-B757-C3D623FF88D6}"/>
-              </a:ext>
-            </a:extLst>
-          </p:cNvPr>
-          <p:cNvSpPr>
-            <a:spLocks noGrp="1"/>
-          </p:cNvSpPr>
-          <p:nvPr>
-            <p:ph type="title"/>
-          </p:nvPr>
-        </p:nvSpPr>
-        <p:spPr/>
-        <p:txBody>
-          <a:bodyPr/>
-          <a:lstStyle/>
-          <a:p>
-            <a:r>
-              <a:rPr lang="hu-HU" dirty="0">
-                <a:solidFill>
-                  <a:schemeClr val="bg1"/>
-                </a:solidFill>
-                <a:latin typeface="Times New Roman" panose="02020603050405020304" pitchFamily="18" charset="0"/>
-                <a:cs typeface="Times New Roman" panose="02020603050405020304" pitchFamily="18" charset="0"/>
-              </a:rPr>
-              <a:t>Használat</a:t>
-            </a:r>
-          </a:p>
-        </p:txBody>
-      </p:sp>
-      <p:sp>
-        <p:nvSpPr>
-          <p:cNvPr id="3" name="Tartalom helye 2">
-            <a:extLst>
-              <a:ext uri="{FF2B5EF4-FFF2-40B4-BE49-F238E27FC236}">
-                <a16:creationId xmlns:a16="http://schemas.microsoft.com/office/drawing/2014/main" id="{8AAFD0D0-46A9-4205-B30F-11CD74A408BB}"/>
-              </a:ext>
-            </a:extLst>
-          </p:cNvPr>
-          <p:cNvSpPr>
-            <a:spLocks noGrp="1"/>
-          </p:cNvSpPr>
-          <p:nvPr>
-            <p:ph idx="1"/>
-          </p:nvPr>
-        </p:nvSpPr>
-        <p:spPr/>
-        <p:txBody>
-          <a:bodyPr/>
-          <a:lstStyle/>
-          <a:p>
-            <a:r>
-              <a:rPr lang="hu-HU" dirty="0">
-                <a:solidFill>
-                  <a:schemeClr val="bg1"/>
-                </a:solidFill>
-                <a:effectLst/>
-                <a:latin typeface="Times New Roman" panose="02020603050405020304" pitchFamily="18" charset="0"/>
-                <a:cs typeface="Times New Roman" panose="02020603050405020304" pitchFamily="18" charset="0"/>
-              </a:rPr>
-              <a:t>Regisztráció után </a:t>
-            </a:r>
-            <a:r>
-              <a:rPr lang="hu-HU" dirty="0" err="1">
-                <a:solidFill>
-                  <a:schemeClr val="bg1"/>
-                </a:solidFill>
-                <a:effectLst/>
-                <a:latin typeface="Times New Roman" panose="02020603050405020304" pitchFamily="18" charset="0"/>
-                <a:cs typeface="Times New Roman" panose="02020603050405020304" pitchFamily="18" charset="0"/>
-              </a:rPr>
-              <a:t>demo</a:t>
-            </a:r>
-            <a:r>
-              <a:rPr lang="hu-HU" dirty="0">
-                <a:solidFill>
-                  <a:schemeClr val="bg1"/>
-                </a:solidFill>
-                <a:effectLst/>
-                <a:latin typeface="Times New Roman" panose="02020603050405020304" pitchFamily="18" charset="0"/>
-                <a:cs typeface="Times New Roman" panose="02020603050405020304" pitchFamily="18" charset="0"/>
-              </a:rPr>
-              <a:t> számla aktiválása HA van már fiók akkor bejelentkezés</a:t>
-            </a:r>
-          </a:p>
-          <a:p>
-            <a:r>
-              <a:rPr lang="hu-HU" dirty="0">
-                <a:solidFill>
-                  <a:schemeClr val="bg1"/>
-                </a:solidFill>
-                <a:latin typeface="Times New Roman" panose="02020603050405020304" pitchFamily="18" charset="0"/>
-                <a:cs typeface="Times New Roman" panose="02020603050405020304" pitchFamily="18" charset="0"/>
-              </a:rPr>
-              <a:t>Kívánt részvény kiválasztása, illetve oktatóanyagok, hírek, riportok diagrammok megfigyelése saját kívánság szerint</a:t>
-            </a:r>
-          </a:p>
-          <a:p>
-            <a:endParaRPr lang="hu-HU" dirty="0">
-              <a:latin typeface="Times New Roman" panose="02020603050405020304" pitchFamily="18" charset="0"/>
-              <a:cs typeface="Times New Roman" panose="02020603050405020304" pitchFamily="18" charset="0"/>
-            </a:endParaRPr>
-          </a:p>
-          <a:p>
-            <a:pPr algn="l"/>
-            <a:endParaRPr lang="hu-HU" dirty="0">
-              <a:effectLst/>
-              <a:latin typeface="Times New Roman" panose="02020603050405020304" pitchFamily="18" charset="0"/>
-              <a:cs typeface="Times New Roman" panose="02020603050405020304" pitchFamily="18" charset="0"/>
-            </a:endParaRPr>
-          </a:p>
-        </p:txBody>
-      </p:sp>
-      <p:pic>
-        <p:nvPicPr>
-          <p:cNvPr id="8" name="Kép 7">
-            <a:extLst>
-              <a:ext uri="{FF2B5EF4-FFF2-40B4-BE49-F238E27FC236}">
-                <a16:creationId xmlns:a16="http://schemas.microsoft.com/office/drawing/2014/main" id="{20CC5E93-2B66-4D51-8D91-A0D23651C615}"/>
-              </a:ext>
-            </a:extLst>
-          </p:cNvPr>
-          <p:cNvPicPr>
-            <a:picLocks noChangeAspect="1"/>
-          </p:cNvPicPr>
-          <p:nvPr/>
-        </p:nvPicPr>
-        <p:blipFill>
-          <a:blip r:embed="rId5">
-            <a:extLst>
-              <a:ext uri="{28A0092B-C50C-407E-A947-70E740481C1C}">
-                <a14:useLocalDpi xmlns:a14="http://schemas.microsoft.com/office/drawing/2010/main" val="0"/>
-              </a:ext>
-            </a:extLst>
-          </a:blip>
-          <a:stretch>
-            <a:fillRect/>
-          </a:stretch>
-        </p:blipFill>
-        <p:spPr>
-          <a:xfrm>
-            <a:off x="0" y="5862479"/>
-            <a:ext cx="1062990" cy="1062990"/>
-          </a:xfrm>
-          <a:prstGeom prst="rect">
-            <a:avLst/>
-          </a:prstGeom>
-        </p:spPr>
-      </p:pic>
-    </p:spTree>
-    <p:extLst>
-      <p:ext uri="{BB962C8B-B14F-4D97-AF65-F5344CB8AC3E}">
-        <p14:creationId xmlns:p14="http://schemas.microsoft.com/office/powerpoint/2010/main" val="2500502515"/>
-      </p:ext>
-    </p:extLst>
-  </p:cSld>
-  <p:clrMapOvr>
-    <a:masterClrMapping/>
-  </p:clrMapOvr>
-  <mc:AlternateContent xmlns:mc="http://schemas.openxmlformats.org/markup-compatibility/2006" xmlns:p14="http://schemas.microsoft.com/office/powerpoint/2010/main">
-    <mc:Choice Requires="p14">
-      <p:transition spd="med" p14:dur="700">
-        <p:fade/>
-      </p:transition>
-    </mc:Choice>
-    <mc:Fallback xmlns="">
-      <p:transition spd="med">
-        <p:fade/>
-      </p:transition>
-    </mc:Fallback>
-  </mc:AlternateContent>
-  <p:timing>
-    <p:tnLst>
-      <p:par>
-        <p:cTn id="1" dur="indefinite" restart="never" nodeType="tmRoot">
-          <p:childTnLst>
-            <p:seq concurrent="1" nextAc="seek">
-              <p:cTn id="2" dur="indefinite" nodeType="mainSeq">
-                <p:childTnLst>
-                  <p:par>
-                    <p:cTn id="3" fill="hold">
-                      <p:stCondLst>
-                        <p:cond delay="indefinite"/>
-                      </p:stCondLst>
-                      <p:childTnLst>
-                        <p:par>
-                          <p:cTn id="4" fill="hold">
-                            <p:stCondLst>
-                              <p:cond delay="0"/>
-                            </p:stCondLst>
-                            <p:childTnLst>
-                              <p:par>
-                                <p:cTn id="5" presetID="10" presetClass="entr" presetSubtype="0" fill="hold" grpId="0" nodeType="clickEffect">
-                                  <p:stCondLst>
-                                    <p:cond delay="0"/>
-                                  </p:stCondLst>
-                                  <p:childTnLst>
-                                    <p:set>
-                                      <p:cBhvr>
-                                        <p:cTn id="6" dur="1" fill="hold">
-                                          <p:stCondLst>
-                                            <p:cond delay="0"/>
-                                          </p:stCondLst>
-                                        </p:cTn>
-                                        <p:tgtEl>
-                                          <p:spTgt spid="2"/>
-                                        </p:tgtEl>
-                                        <p:attrNameLst>
-                                          <p:attrName>style.visibility</p:attrName>
-                                        </p:attrNameLst>
-                                      </p:cBhvr>
-                                      <p:to>
-                                        <p:strVal val="visible"/>
-                                      </p:to>
-                                    </p:set>
-                                    <p:animEffect transition="in" filter="fade">
-                                      <p:cBhvr>
-                                        <p:cTn id="7" dur="500"/>
-                                        <p:tgtEl>
-                                          <p:spTgt spid="2"/>
-                                        </p:tgtEl>
-                                      </p:cBhvr>
-                                    </p:animEffect>
-                                  </p:childTnLst>
-                                </p:cTn>
-                              </p:par>
-                            </p:childTnLst>
-                          </p:cTn>
-                        </p:par>
-                      </p:childTnLst>
-                    </p:cTn>
-                  </p:par>
-                  <p:par>
-                    <p:cTn id="8" fill="hold">
-                      <p:stCondLst>
-                        <p:cond delay="indefinite"/>
-                      </p:stCondLst>
-                      <p:childTnLst>
-                        <p:par>
-                          <p:cTn id="9" fill="hold">
-                            <p:stCondLst>
-                              <p:cond delay="0"/>
-                            </p:stCondLst>
-                            <p:childTnLst>
-                              <p:par>
-                                <p:cTn id="10" presetID="10" presetClass="entr" presetSubtype="0" fill="hold" nodeType="clickEffect">
-                                  <p:stCondLst>
-                                    <p:cond delay="0"/>
-                                  </p:stCondLst>
-                                  <p:childTnLst>
-                                    <p:set>
-                                      <p:cBhvr>
-                                        <p:cTn id="11" dur="1" fill="hold">
-                                          <p:stCondLst>
-                                            <p:cond delay="0"/>
-                                          </p:stCondLst>
-                                        </p:cTn>
-                                        <p:tgtEl>
-                                          <p:spTgt spid="3">
-                                            <p:txEl>
-                                              <p:pRg st="0" end="0"/>
-                                            </p:txEl>
-                                          </p:spTgt>
-                                        </p:tgtEl>
-                                        <p:attrNameLst>
-                                          <p:attrName>style.visibility</p:attrName>
-                                        </p:attrNameLst>
-                                      </p:cBhvr>
-                                      <p:to>
-                                        <p:strVal val="visible"/>
-                                      </p:to>
-                                    </p:set>
-                                    <p:animEffect transition="in" filter="fade">
-                                      <p:cBhvr>
-                                        <p:cTn id="12" dur="500"/>
-                                        <p:tgtEl>
-                                          <p:spTgt spid="3">
-                                            <p:txEl>
-                                              <p:pRg st="0" end="0"/>
-                                            </p:txEl>
-                                          </p:spTgt>
-                                        </p:tgtEl>
-                                      </p:cBhvr>
-                                    </p:animEffect>
-                                  </p:childTnLst>
-                                </p:cTn>
-                              </p:par>
-                              <p:par>
-                                <p:cTn id="13" presetID="10" presetClass="entr" presetSubtype="0" fill="hold" nodeType="withEffect">
-                                  <p:stCondLst>
-                                    <p:cond delay="0"/>
-                                  </p:stCondLst>
-                                  <p:childTnLst>
-                                    <p:set>
-                                      <p:cBhvr>
-                                        <p:cTn id="14" dur="1" fill="hold">
-                                          <p:stCondLst>
-                                            <p:cond delay="0"/>
-                                          </p:stCondLst>
-                                        </p:cTn>
-                                        <p:tgtEl>
-                                          <p:spTgt spid="3">
-                                            <p:txEl>
-                                              <p:pRg st="1" end="1"/>
-                                            </p:txEl>
-                                          </p:spTgt>
-                                        </p:tgtEl>
-                                        <p:attrNameLst>
-                                          <p:attrName>style.visibility</p:attrName>
-                                        </p:attrNameLst>
-                                      </p:cBhvr>
-                                      <p:to>
-                                        <p:strVal val="visible"/>
-                                      </p:to>
-                                    </p:set>
-                                    <p:animEffect transition="in" filter="fade">
-                                      <p:cBhvr>
-                                        <p:cTn id="15" dur="500"/>
-                                        <p:tgtEl>
-                                          <p:spTgt spid="3">
-                                            <p:txEl>
-                                              <p:pRg st="1" end="1"/>
-                                            </p:txEl>
-                                          </p:spTgt>
-                                        </p:tgtEl>
-                                      </p:cBhvr>
-                                    </p:animEffect>
-                                  </p:childTnLst>
-                                </p:cTn>
-                              </p:par>
-                            </p:childTnLst>
-                          </p:cTn>
-                        </p:par>
-                      </p:childTnLst>
-                    </p:cTn>
-                  </p:par>
-                </p:childTnLst>
-              </p:cTn>
-              <p:prevCondLst>
-                <p:cond evt="onPrev" delay="0">
-                  <p:tgtEl>
-                    <p:sldTgt/>
-                  </p:tgtEl>
-                </p:cond>
-              </p:prevCondLst>
-              <p:nextCondLst>
-                <p:cond evt="onNext" delay="0">
-                  <p:tgtEl>
-                    <p:sldTgt/>
-                  </p:tgtEl>
-                </p:cond>
-              </p:nextCondLst>
-            </p:seq>
-          </p:childTnLst>
-        </p:cTn>
-      </p:par>
-    </p:tnLst>
-    <p:bldLst>
-      <p:bldP spid="2" grpId="0"/>
-    </p:bldLst>
-  </p:timing>
-</p:sld>
-</file>
-
-<file path=ppt/slides/slide5.xml><?xml version="1.0" encoding="utf-8"?>
 <p:sld xmlns:a="http://schemas.openxmlformats.org/drawingml/2006/main" xmlns:r="http://schemas.openxmlformats.org/officeDocument/2006/relationships" xmlns:p="http://schemas.openxmlformats.org/presentationml/2006/main">
   <p:cSld>
     <p:spTree>
@@ -10763,7 +10259,7 @@
 </p:sld>
 </file>
 
-<file path=ppt/slides/slide6.xml><?xml version="1.0" encoding="utf-8"?>
+<file path=ppt/slides/slide5.xml><?xml version="1.0" encoding="utf-8"?>
 <p:sld xmlns:a="http://schemas.openxmlformats.org/drawingml/2006/main" xmlns:r="http://schemas.openxmlformats.org/officeDocument/2006/relationships" xmlns:p="http://schemas.openxmlformats.org/presentationml/2006/main">
   <p:cSld>
     <p:spTree>
@@ -11333,7 +10829,7 @@
 </p:sld>
 </file>
 
-<file path=ppt/slides/slide7.xml><?xml version="1.0" encoding="utf-8"?>
+<file path=ppt/slides/slide6.xml><?xml version="1.0" encoding="utf-8"?>
 <p:sld xmlns:a="http://schemas.openxmlformats.org/drawingml/2006/main" xmlns:r="http://schemas.openxmlformats.org/officeDocument/2006/relationships" xmlns:p="http://schemas.openxmlformats.org/presentationml/2006/main">
   <p:cSld>
     <p:spTree>
@@ -12033,7 +11529,7 @@
 </p:sld>
 </file>
 
-<file path=ppt/slides/slide8.xml><?xml version="1.0" encoding="utf-8"?>
+<file path=ppt/slides/slide7.xml><?xml version="1.0" encoding="utf-8"?>
 <p:sld xmlns:a="http://schemas.openxmlformats.org/drawingml/2006/main" xmlns:r="http://schemas.openxmlformats.org/officeDocument/2006/relationships" xmlns:p="http://schemas.openxmlformats.org/presentationml/2006/main">
   <p:cSld>
     <p:spTree>
@@ -12456,7 +11952,7 @@
 </p:sld>
 </file>
 
-<file path=ppt/slides/slide9.xml><?xml version="1.0" encoding="utf-8"?>
+<file path=ppt/slides/slide8.xml><?xml version="1.0" encoding="utf-8"?>
 <p:sld xmlns:a="http://schemas.openxmlformats.org/drawingml/2006/main" xmlns:r="http://schemas.openxmlformats.org/officeDocument/2006/relationships" xmlns:p="http://schemas.openxmlformats.org/presentationml/2006/main">
   <p:cSld>
     <p:spTree>
@@ -13152,6 +12648,508 @@
                                         <p:cTn id="27" dur="500"/>
                                         <p:tgtEl>
                                           <p:spTgt spid="10"/>
+                                        </p:tgtEl>
+                                      </p:cBhvr>
+                                    </p:animEffect>
+                                  </p:childTnLst>
+                                </p:cTn>
+                              </p:par>
+                            </p:childTnLst>
+                          </p:cTn>
+                        </p:par>
+                      </p:childTnLst>
+                    </p:cTn>
+                  </p:par>
+                </p:childTnLst>
+              </p:cTn>
+              <p:prevCondLst>
+                <p:cond evt="onPrev" delay="0">
+                  <p:tgtEl>
+                    <p:sldTgt/>
+                  </p:tgtEl>
+                </p:cond>
+              </p:prevCondLst>
+              <p:nextCondLst>
+                <p:cond evt="onNext" delay="0">
+                  <p:tgtEl>
+                    <p:sldTgt/>
+                  </p:tgtEl>
+                </p:cond>
+              </p:nextCondLst>
+            </p:seq>
+          </p:childTnLst>
+        </p:cTn>
+      </p:par>
+    </p:tnLst>
+    <p:bldLst>
+      <p:bldP spid="2" grpId="0"/>
+    </p:bldLst>
+  </p:timing>
+</p:sld>
+</file>
+
+<file path=ppt/slides/slide9.xml><?xml version="1.0" encoding="utf-8"?>
+<p:sld xmlns:a="http://schemas.openxmlformats.org/drawingml/2006/main" xmlns:r="http://schemas.openxmlformats.org/officeDocument/2006/relationships" xmlns:p="http://schemas.openxmlformats.org/presentationml/2006/main">
+  <p:cSld>
+    <p:spTree>
+      <p:nvGrpSpPr>
+        <p:cNvPr id="1" name=""/>
+        <p:cNvGrpSpPr/>
+        <p:nvPr/>
+      </p:nvGrpSpPr>
+      <p:grpSpPr>
+        <a:xfrm>
+          <a:off x="0" y="0"/>
+          <a:ext cx="0" cy="0"/>
+          <a:chOff x="0" y="0"/>
+          <a:chExt cx="0" cy="0"/>
+        </a:xfrm>
+      </p:grpSpPr>
+      <p:pic>
+        <p:nvPicPr>
+          <p:cNvPr id="4" name="Kép 3">
+            <a:extLst>
+              <a:ext uri="{FF2B5EF4-FFF2-40B4-BE49-F238E27FC236}">
+                <a16:creationId xmlns:a16="http://schemas.microsoft.com/office/drawing/2014/main" id="{4398B1F8-D5FC-4ED9-B953-F4063FBB716B}"/>
+              </a:ext>
+            </a:extLst>
+          </p:cNvPr>
+          <p:cNvPicPr>
+            <a:picLocks noChangeAspect="1"/>
+          </p:cNvPicPr>
+          <p:nvPr/>
+        </p:nvPicPr>
+        <p:blipFill>
+          <a:blip r:embed="rId3">
+            <a:extLst>
+              <a:ext uri="{BEBA8EAE-BF5A-486C-A8C5-ECC9F3942E4B}">
+                <a14:imgProps xmlns:a14="http://schemas.microsoft.com/office/drawing/2010/main">
+                  <a14:imgLayer r:embed="rId4">
+                    <a14:imgEffect>
+                      <a14:sharpenSoften amount="-49000"/>
+                    </a14:imgEffect>
+                    <a14:imgEffect>
+                      <a14:brightnessContrast bright="-20000"/>
+                    </a14:imgEffect>
+                  </a14:imgLayer>
+                </a14:imgProps>
+              </a:ext>
+              <a:ext uri="{28A0092B-C50C-407E-A947-70E740481C1C}">
+                <a14:useLocalDpi xmlns:a14="http://schemas.microsoft.com/office/drawing/2010/main" val="0"/>
+              </a:ext>
+            </a:extLst>
+          </a:blip>
+          <a:stretch>
+            <a:fillRect/>
+          </a:stretch>
+        </p:blipFill>
+        <p:spPr>
+          <a:xfrm>
+            <a:off x="0" y="-6376"/>
+            <a:ext cx="12192000" cy="6864376"/>
+          </a:xfrm>
+          <a:prstGeom prst="rect">
+            <a:avLst/>
+          </a:prstGeom>
+          <a:effectLst>
+            <a:outerShdw dist="50800" dir="5400000" algn="ctr" rotWithShape="0">
+              <a:srgbClr val="000000">
+                <a:alpha val="96000"/>
+              </a:srgbClr>
+            </a:outerShdw>
+          </a:effectLst>
+        </p:spPr>
+      </p:pic>
+      <p:sp>
+        <p:nvSpPr>
+          <p:cNvPr id="2" name="Cím 1">
+            <a:extLst>
+              <a:ext uri="{FF2B5EF4-FFF2-40B4-BE49-F238E27FC236}">
+                <a16:creationId xmlns:a16="http://schemas.microsoft.com/office/drawing/2014/main" id="{4BFBBD52-0111-435C-8EB6-330B2C32A2BD}"/>
+              </a:ext>
+            </a:extLst>
+          </p:cNvPr>
+          <p:cNvSpPr>
+            <a:spLocks noGrp="1"/>
+          </p:cNvSpPr>
+          <p:nvPr>
+            <p:ph type="title"/>
+          </p:nvPr>
+        </p:nvSpPr>
+        <p:spPr/>
+        <p:txBody>
+          <a:bodyPr/>
+          <a:lstStyle/>
+          <a:p>
+            <a:r>
+              <a:rPr lang="hu-HU" dirty="0" err="1">
+                <a:solidFill>
+                  <a:schemeClr val="bg1"/>
+                </a:solidFill>
+                <a:latin typeface="Times New Roman" panose="02020603050405020304" pitchFamily="18" charset="0"/>
+                <a:cs typeface="Times New Roman" panose="02020603050405020304" pitchFamily="18" charset="0"/>
+              </a:rPr>
+              <a:t>Reszponzivitás</a:t>
+            </a:r>
+            <a:endParaRPr lang="hu-HU" dirty="0">
+              <a:solidFill>
+                <a:schemeClr val="bg1"/>
+              </a:solidFill>
+              <a:latin typeface="Times New Roman" panose="02020603050405020304" pitchFamily="18" charset="0"/>
+              <a:cs typeface="Times New Roman" panose="02020603050405020304" pitchFamily="18" charset="0"/>
+            </a:endParaRPr>
+          </a:p>
+        </p:txBody>
+      </p:sp>
+      <p:sp>
+        <p:nvSpPr>
+          <p:cNvPr id="3" name="Tartalom helye 2">
+            <a:extLst>
+              <a:ext uri="{FF2B5EF4-FFF2-40B4-BE49-F238E27FC236}">
+                <a16:creationId xmlns:a16="http://schemas.microsoft.com/office/drawing/2014/main" id="{8639ED68-E103-44AF-8DE0-88D129750697}"/>
+              </a:ext>
+            </a:extLst>
+          </p:cNvPr>
+          <p:cNvSpPr>
+            <a:spLocks noGrp="1"/>
+          </p:cNvSpPr>
+          <p:nvPr>
+            <p:ph idx="1"/>
+          </p:nvPr>
+        </p:nvSpPr>
+        <p:spPr/>
+        <p:txBody>
+          <a:bodyPr/>
+          <a:lstStyle/>
+          <a:p>
+            <a:r>
+              <a:rPr lang="hu-HU" dirty="0" err="1">
+                <a:solidFill>
+                  <a:schemeClr val="bg1"/>
+                </a:solidFill>
+                <a:latin typeface="Times New Roman" panose="02020603050405020304" pitchFamily="18" charset="0"/>
+                <a:cs typeface="Times New Roman" panose="02020603050405020304" pitchFamily="18" charset="0"/>
+              </a:rPr>
+              <a:t>Bootstrap</a:t>
+            </a:r>
+            <a:r>
+              <a:rPr lang="hu-HU" dirty="0">
+                <a:solidFill>
+                  <a:schemeClr val="bg1"/>
+                </a:solidFill>
+                <a:latin typeface="Times New Roman" panose="02020603050405020304" pitchFamily="18" charset="0"/>
+                <a:cs typeface="Times New Roman" panose="02020603050405020304" pitchFamily="18" charset="0"/>
+              </a:rPr>
+              <a:t> </a:t>
+            </a:r>
+            <a:r>
+              <a:rPr lang="hu-HU" dirty="0" err="1">
+                <a:solidFill>
+                  <a:schemeClr val="bg1"/>
+                </a:solidFill>
+                <a:latin typeface="Times New Roman" panose="02020603050405020304" pitchFamily="18" charset="0"/>
+                <a:cs typeface="Times New Roman" panose="02020603050405020304" pitchFamily="18" charset="0"/>
+              </a:rPr>
+              <a:t>grid</a:t>
+            </a:r>
+            <a:r>
+              <a:rPr lang="hu-HU" dirty="0">
+                <a:solidFill>
+                  <a:schemeClr val="bg1"/>
+                </a:solidFill>
+                <a:latin typeface="Times New Roman" panose="02020603050405020304" pitchFamily="18" charset="0"/>
+                <a:cs typeface="Times New Roman" panose="02020603050405020304" pitchFamily="18" charset="0"/>
+              </a:rPr>
+              <a:t> rendszer alkalmazása</a:t>
+            </a:r>
+          </a:p>
+          <a:p>
+            <a:r>
+              <a:rPr lang="hu-HU" dirty="0">
+                <a:solidFill>
+                  <a:schemeClr val="bg1"/>
+                </a:solidFill>
+                <a:latin typeface="Times New Roman" panose="02020603050405020304" pitchFamily="18" charset="0"/>
+                <a:cs typeface="Times New Roman" panose="02020603050405020304" pitchFamily="18" charset="0"/>
+              </a:rPr>
+              <a:t>Dinamikusan alkalmazkodó felhasználói felület</a:t>
+            </a:r>
+          </a:p>
+          <a:p>
+            <a:r>
+              <a:rPr lang="hu-HU" dirty="0">
+                <a:solidFill>
+                  <a:schemeClr val="bg1"/>
+                </a:solidFill>
+                <a:latin typeface="Times New Roman" panose="02020603050405020304" pitchFamily="18" charset="0"/>
+                <a:cs typeface="Times New Roman" panose="02020603050405020304" pitchFamily="18" charset="0"/>
+              </a:rPr>
+              <a:t>Grafikonok és elemek méretezése képernyőhöz igazítva</a:t>
+            </a:r>
+          </a:p>
+          <a:p>
+            <a:r>
+              <a:rPr lang="hu-HU" dirty="0">
+                <a:solidFill>
+                  <a:schemeClr val="bg1"/>
+                </a:solidFill>
+                <a:latin typeface="Times New Roman" panose="02020603050405020304" pitchFamily="18" charset="0"/>
+                <a:cs typeface="Times New Roman" panose="02020603050405020304" pitchFamily="18" charset="0"/>
+              </a:rPr>
+              <a:t>Egységes és kényelmes felhasználói élmény minden platformon</a:t>
+            </a:r>
+          </a:p>
+        </p:txBody>
+      </p:sp>
+    </p:spTree>
+    <p:extLst>
+      <p:ext uri="{BB962C8B-B14F-4D97-AF65-F5344CB8AC3E}">
+        <p14:creationId xmlns:p14="http://schemas.microsoft.com/office/powerpoint/2010/main" val="1073263235"/>
+      </p:ext>
+    </p:extLst>
+  </p:cSld>
+  <p:clrMapOvr>
+    <a:masterClrMapping/>
+  </p:clrMapOvr>
+  <p:timing>
+    <p:tnLst>
+      <p:par>
+        <p:cTn id="1" dur="indefinite" restart="never" nodeType="tmRoot">
+          <p:childTnLst>
+            <p:seq concurrent="1" nextAc="seek">
+              <p:cTn id="2" dur="indefinite" nodeType="mainSeq">
+                <p:childTnLst>
+                  <p:par>
+                    <p:cTn id="3" fill="hold">
+                      <p:stCondLst>
+                        <p:cond delay="indefinite"/>
+                      </p:stCondLst>
+                      <p:childTnLst>
+                        <p:par>
+                          <p:cTn id="4" fill="hold">
+                            <p:stCondLst>
+                              <p:cond delay="0"/>
+                            </p:stCondLst>
+                            <p:childTnLst>
+                              <p:par>
+                                <p:cTn id="5" presetID="10" presetClass="entr" presetSubtype="0" fill="hold" grpId="0" nodeType="clickEffect">
+                                  <p:stCondLst>
+                                    <p:cond delay="0"/>
+                                  </p:stCondLst>
+                                  <p:childTnLst>
+                                    <p:set>
+                                      <p:cBhvr>
+                                        <p:cTn id="6" dur="1" fill="hold">
+                                          <p:stCondLst>
+                                            <p:cond delay="0"/>
+                                          </p:stCondLst>
+                                        </p:cTn>
+                                        <p:tgtEl>
+                                          <p:spTgt spid="2"/>
+                                        </p:tgtEl>
+                                        <p:attrNameLst>
+                                          <p:attrName>style.visibility</p:attrName>
+                                        </p:attrNameLst>
+                                      </p:cBhvr>
+                                      <p:to>
+                                        <p:strVal val="visible"/>
+                                      </p:to>
+                                    </p:set>
+                                    <p:animEffect transition="in" filter="fade">
+                                      <p:cBhvr>
+                                        <p:cTn id="7" dur="500"/>
+                                        <p:tgtEl>
+                                          <p:spTgt spid="2"/>
+                                        </p:tgtEl>
+                                      </p:cBhvr>
+                                    </p:animEffect>
+                                  </p:childTnLst>
+                                </p:cTn>
+                              </p:par>
+                            </p:childTnLst>
+                          </p:cTn>
+                        </p:par>
+                      </p:childTnLst>
+                    </p:cTn>
+                  </p:par>
+                  <p:par>
+                    <p:cTn id="8" fill="hold">
+                      <p:stCondLst>
+                        <p:cond delay="indefinite"/>
+                      </p:stCondLst>
+                      <p:childTnLst>
+                        <p:par>
+                          <p:cTn id="9" fill="hold">
+                            <p:stCondLst>
+                              <p:cond delay="0"/>
+                            </p:stCondLst>
+                            <p:childTnLst>
+                              <p:par>
+                                <p:cTn id="10" presetID="10" presetClass="entr" presetSubtype="0" fill="hold" nodeType="clickEffect">
+                                  <p:stCondLst>
+                                    <p:cond delay="0"/>
+                                  </p:stCondLst>
+                                  <p:childTnLst>
+                                    <p:set>
+                                      <p:cBhvr>
+                                        <p:cTn id="11" dur="1" fill="hold">
+                                          <p:stCondLst>
+                                            <p:cond delay="0"/>
+                                          </p:stCondLst>
+                                        </p:cTn>
+                                        <p:tgtEl>
+                                          <p:spTgt spid="3">
+                                            <p:txEl>
+                                              <p:pRg st="0" end="0"/>
+                                            </p:txEl>
+                                          </p:spTgt>
+                                        </p:tgtEl>
+                                        <p:attrNameLst>
+                                          <p:attrName>style.visibility</p:attrName>
+                                        </p:attrNameLst>
+                                      </p:cBhvr>
+                                      <p:to>
+                                        <p:strVal val="visible"/>
+                                      </p:to>
+                                    </p:set>
+                                    <p:animEffect transition="in" filter="fade">
+                                      <p:cBhvr>
+                                        <p:cTn id="12" dur="500"/>
+                                        <p:tgtEl>
+                                          <p:spTgt spid="3">
+                                            <p:txEl>
+                                              <p:pRg st="0" end="0"/>
+                                            </p:txEl>
+                                          </p:spTgt>
+                                        </p:tgtEl>
+                                      </p:cBhvr>
+                                    </p:animEffect>
+                                  </p:childTnLst>
+                                </p:cTn>
+                              </p:par>
+                              <p:par>
+                                <p:cTn id="13" presetID="10" presetClass="entr" presetSubtype="0" fill="hold" nodeType="withEffect">
+                                  <p:stCondLst>
+                                    <p:cond delay="0"/>
+                                  </p:stCondLst>
+                                  <p:childTnLst>
+                                    <p:set>
+                                      <p:cBhvr>
+                                        <p:cTn id="14" dur="1" fill="hold">
+                                          <p:stCondLst>
+                                            <p:cond delay="0"/>
+                                          </p:stCondLst>
+                                        </p:cTn>
+                                        <p:tgtEl>
+                                          <p:spTgt spid="3">
+                                            <p:txEl>
+                                              <p:pRg st="1" end="1"/>
+                                            </p:txEl>
+                                          </p:spTgt>
+                                        </p:tgtEl>
+                                        <p:attrNameLst>
+                                          <p:attrName>style.visibility</p:attrName>
+                                        </p:attrNameLst>
+                                      </p:cBhvr>
+                                      <p:to>
+                                        <p:strVal val="visible"/>
+                                      </p:to>
+                                    </p:set>
+                                    <p:animEffect transition="in" filter="fade">
+                                      <p:cBhvr>
+                                        <p:cTn id="15" dur="500"/>
+                                        <p:tgtEl>
+                                          <p:spTgt spid="3">
+                                            <p:txEl>
+                                              <p:pRg st="1" end="1"/>
+                                            </p:txEl>
+                                          </p:spTgt>
+                                        </p:tgtEl>
+                                      </p:cBhvr>
+                                    </p:animEffect>
+                                  </p:childTnLst>
+                                </p:cTn>
+                              </p:par>
+                              <p:par>
+                                <p:cTn id="16" presetID="10" presetClass="entr" presetSubtype="0" fill="hold" nodeType="withEffect">
+                                  <p:stCondLst>
+                                    <p:cond delay="0"/>
+                                  </p:stCondLst>
+                                  <p:childTnLst>
+                                    <p:set>
+                                      <p:cBhvr>
+                                        <p:cTn id="17" dur="1" fill="hold">
+                                          <p:stCondLst>
+                                            <p:cond delay="0"/>
+                                          </p:stCondLst>
+                                        </p:cTn>
+                                        <p:tgtEl>
+                                          <p:spTgt spid="3">
+                                            <p:txEl>
+                                              <p:pRg st="2" end="2"/>
+                                            </p:txEl>
+                                          </p:spTgt>
+                                        </p:tgtEl>
+                                        <p:attrNameLst>
+                                          <p:attrName>style.visibility</p:attrName>
+                                        </p:attrNameLst>
+                                      </p:cBhvr>
+                                      <p:to>
+                                        <p:strVal val="visible"/>
+                                      </p:to>
+                                    </p:set>
+                                    <p:animEffect transition="in" filter="fade">
+                                      <p:cBhvr>
+                                        <p:cTn id="18" dur="500"/>
+                                        <p:tgtEl>
+                                          <p:spTgt spid="3">
+                                            <p:txEl>
+                                              <p:pRg st="2" end="2"/>
+                                            </p:txEl>
+                                          </p:spTgt>
+                                        </p:tgtEl>
+                                      </p:cBhvr>
+                                    </p:animEffect>
+                                  </p:childTnLst>
+                                </p:cTn>
+                              </p:par>
+                              <p:par>
+                                <p:cTn id="19" presetID="10" presetClass="entr" presetSubtype="0" fill="hold" nodeType="withEffect">
+                                  <p:stCondLst>
+                                    <p:cond delay="0"/>
+                                  </p:stCondLst>
+                                  <p:childTnLst>
+                                    <p:set>
+                                      <p:cBhvr>
+                                        <p:cTn id="20" dur="1" fill="hold">
+                                          <p:stCondLst>
+                                            <p:cond delay="0"/>
+                                          </p:stCondLst>
+                                        </p:cTn>
+                                        <p:tgtEl>
+                                          <p:spTgt spid="3">
+                                            <p:txEl>
+                                              <p:pRg st="3" end="3"/>
+                                            </p:txEl>
+                                          </p:spTgt>
+                                        </p:tgtEl>
+                                        <p:attrNameLst>
+                                          <p:attrName>style.visibility</p:attrName>
+                                        </p:attrNameLst>
+                                      </p:cBhvr>
+                                      <p:to>
+                                        <p:strVal val="visible"/>
+                                      </p:to>
+                                    </p:set>
+                                    <p:animEffect transition="in" filter="fade">
+                                      <p:cBhvr>
+                                        <p:cTn id="21" dur="500"/>
+                                        <p:tgtEl>
+                                          <p:spTgt spid="3">
+                                            <p:txEl>
+                                              <p:pRg st="3" end="3"/>
+                                            </p:txEl>
+                                          </p:spTgt>
                                         </p:tgtEl>
                                       </p:cBhvr>
                                     </p:animEffect>

--- a/Dokumentáció/PénzKút_Prezentacio.pptx
+++ b/Dokumentáció/PénzKút_Prezentacio.pptx
@@ -1037,7 +1037,15 @@
             </a:r>
             <a:r>
               <a:rPr lang="hu-HU" dirty="0"/>
-              <a:t>' pénzzel teszi lehetővé a tőzsde megismerését. A projekt lényege nem csak a vétel és eladás gombok nyomogatása, hanem a tudatos tanulás. A rendszerbe integráltunk egy oktatási modult is, ahol a felhasználók elméleti erőt meríthetnek a sikeres kereskedéshez.</a:t>
+              <a:t>' pénzzel teszi lehetővé a tőzsde megismerését. A projekt lényege nem csak a vétel és eladás gombok nyomogatása, hanem a tudatos tanulás. A rendszerbe integráltunk egy oktatási modult is, ahol a felhasználók </a:t>
+            </a:r>
+            <a:r>
+              <a:rPr lang="hu-HU"/>
+              <a:t>elméleti tudást </a:t>
+            </a:r>
+            <a:r>
+              <a:rPr lang="hu-HU" dirty="0"/>
+              <a:t>meríthetnek a sikeres kereskedéshez.</a:t>
             </a:r>
           </a:p>
           <a:p>
